--- a/system-design-101/vi/lessons/sd-01-017/slides/sd-01-017.pptx
+++ b/system-design-101/vi/lessons/sd-01-017/slides/sd-01-017.pptx
@@ -12780,6 +12780,28 @@
                 <a:cs typeface="Bricolage Grotesque ExtraBold" pitchFamily="34" charset="-120"/>
               </a:rPr>
               <a:t> ràng</a:t>
+            </a:r>
+            <a:r>
+              <a:rPr lang="en-US" sz="7800" dirty="0" spc="8" kern="0">
+                <a:solidFill>
+                  <a:srgbClr val="14161C"/>
+                </a:solidFill>
+                <a:latin typeface="Bricolage Grotesque ExtraBold" pitchFamily="34" charset="0"/>
+                <a:ea typeface="Bricolage Grotesque ExtraBold" pitchFamily="34" charset="-122"/>
+                <a:cs typeface="Bricolage Grotesque ExtraBold" pitchFamily="34" charset="-120"/>
+              </a:rPr>
+              <a:t> buộc</a:t>
+            </a:r>
+            <a:r>
+              <a:rPr lang="en-US" sz="7800" dirty="0" spc="-6" kern="0">
+                <a:solidFill>
+                  <a:srgbClr val="14161C"/>
+                </a:solidFill>
+                <a:latin typeface="Bricolage Grotesque ExtraBold" pitchFamily="34" charset="0"/>
+                <a:ea typeface="Bricolage Grotesque ExtraBold" pitchFamily="34" charset="-122"/>
+                <a:cs typeface="Bricolage Grotesque ExtraBold" pitchFamily="34" charset="-120"/>
+              </a:rPr>
+              <a:t> bắt</a:t>
             </a:r>
             <a:r>
               <a:rPr lang="en-US" sz="7800" dirty="0" spc="8" kern="0">
